--- a/site/public/slides/tts-day2-active-beats-passive.pptx
+++ b/site/public/slides/tts-day2-active-beats-passive.pptx
@@ -1667,11 +1667,6 @@
           <a:p>
             <a:r>
               <a:t>  If B wins: 'already. Now imagine a week.'</a:t>
-            </a:r>
-          </a:p>
-          <a:p>
-            <a:r>
-              <a:t>  'Keep your blorps safe. We'll see who remembers next week.'</a:t>
             </a:r>
           </a:p>
           <a:p>
@@ -6499,41 +6494,6 @@
                 <a:latin typeface="Georgia"/>
               </a:rPr>
               <a:t>did it stick?</a:t>
-            </a:r>
-          </a:p>
-        </p:txBody>
-      </p:sp>
-      <p:sp>
-        <p:nvSpPr>
-          <p:cNvPr id="3" name="TextBox 2"/>
-          <p:cNvSpPr txBox="1"/>
-          <p:nvPr/>
-        </p:nvSpPr>
-        <p:spPr>
-          <a:xfrm>
-            <a:off x="914400" y="3840480"/>
-            <a:ext cx="10362895" cy="640080"/>
-          </a:xfrm>
-          <a:prstGeom prst="rect">
-            <a:avLst/>
-          </a:prstGeom>
-          <a:noFill/>
-        </p:spPr>
-        <p:txBody>
-          <a:bodyPr wrap="square" lIns="73152" rIns="73152" anchor="t">
-            <a:spAutoFit/>
-          </a:bodyPr>
-          <a:lstStyle/>
-          <a:p>
-            <a:pPr algn="ctr"/>
-            <a:r>
-              <a:rPr sz="3000" b="0">
-                <a:solidFill>
-                  <a:srgbClr val="4C4F69"/>
-                </a:solidFill>
-                <a:latin typeface="Aptos"/>
-              </a:rPr>
-              <a:t>(Bring your blorps.)</a:t>
             </a:r>
           </a:p>
         </p:txBody>

--- a/site/public/slides/tts-day2-active-beats-passive.pptx
+++ b/site/public/slides/tts-day2-active-beats-passive.pptx
@@ -1772,7 +1772,7 @@
           </a:p>
           <a:p>
             <a:r>
-              <a:t>  That's why the sessions are a week apart, and why we'll test the blorps again next week.</a:t>
+              <a:t>  That's why the sessions are a week apart.</a:t>
             </a:r>
           </a:p>
           <a:p>

--- a/site/public/slides/tts-day2-active-beats-passive.pptx
+++ b/site/public/slides/tts-day2-active-beats-passive.pptx
@@ -491,6 +491,16 @@
           </a:p>
           <a:p>
             <a:r>
+              <a:t>  Back to the ranking from the Menti tour (show the result). That's what we FEEL helps. Research puts them in an order: listening, then doing something with it, then explaining it in your own words, then working it through together. The more people do with an idea, the more they tend to learn.</a:t>
+            </a:r>
+          </a:p>
+          <a:p>
+            <a:r>
+              <a:t>  This is a scale, not percentages: the 'learning pyramid' (5% for lectures, 90% for teaching others) was never measured.</a:t>
+            </a:r>
+          </a:p>
+          <a:p>
+            <a:r>
               <a:t>  Take the session you rebuilt last week. Pick ten minutes. Make learners DO something in its real setting: ward corridor, handover, sim room. Use at least one strategy (the mats stay on the table as a menu).</a:t>
             </a:r>
           </a:p>
@@ -506,7 +516,12 @@
           </a:p>
           <a:p>
             <a:r>
-              <a:t>  Situated learning: design for the real constraints (Lave &amp; Wenger 1991). → /papers/lave-wenger-1991</a:t>
+              <a:t>  Situated learning: design for the real constraints (Lave &amp; Wenger 1991). → /papers/learning-by-taking-part</a:t>
+            </a:r>
+          </a:p>
+          <a:p>
+            <a:r>
+              <a:t>  The scale is ICAP (Chi &amp; Wylie 2014): the broad order is well supported; the exact steps are debated. Like the blorps: what feels like it works today isn't always what lasts. → /theories/active-is-a-scale</a:t>
             </a:r>
           </a:p>
           <a:p>
@@ -531,7 +546,7 @@
           </a:p>
           <a:p>
             <a:r>
-              <a:t>  Circulate: what will learners be doing in minute 3? Which strategy is that?</a:t>
+              <a:t>  Circulate: what will learners be doing in minute 3? Which strategy is that, and which step on the scale?</a:t>
             </a:r>
           </a:p>
         </p:txBody>
@@ -1570,7 +1585,12 @@
           </a:p>
           <a:p>
             <a:r>
-              <a:t>  1 Multiple choice: which of these do you dread most at work? · 2 100 points: you have £100m; split it: housing / family / charity / travel · 3 Pin on image: 'spot the difference' (mask one half in Menti) · 4 Ranking: how do you prefer to learn? discussing / watching YouTube / reading / 'nothing, just biscuits and tea'</a:t>
+              <a:t>  1 Multiple choice: which of these do you dread most at work? · 2 100 points: you have £100m; split it: housing / family / charity / travel · 3 Pin on image: 'spot the difference' (mask one half in Menti) · 4 Ranking: what helps you learn most? listening to a talk / taking notes / explaining it to someone / working it through with colleagues / 'nothing, just biscuits and tea'</a:t>
+            </a:r>
+          </a:p>
+          <a:p>
+            <a:r>
+              <a:t>  Keep the ranking result for 'Make 10 minutes active'. Don't explain it yet.</a:t>
             </a:r>
           </a:p>
           <a:p>
